--- a/m4/diapositivos/sessao-04-m4-f06.pptx
+++ b/m4/diapositivos/sessao-04-m4-f06.pptx
@@ -1873,13 +1873,10 @@
               <a:lnSpc>
                 <a:spcPct val="120000"/>
               </a:lnSpc>
-              <a:spcAft>
-                <a:spcPts val="1000"/>
-              </a:spcAft>
-              <a:buNone/>
-            </a:pPr>
-            <a:r>
-              <a:rPr lang="en-US" sz="2000" dirty="0">
+              <a:buNone/>
+            </a:pPr>
+            <a:r>
+              <a:rPr lang="en-US" sz="2000" b="1" dirty="0">
                 <a:solidFill>
                   <a:srgbClr val="F2F0EA"/>
                 </a:solidFill>
@@ -1887,18 +1884,12 @@
                 <a:ea typeface="Georgia" pitchFamily="34" charset="-122"/>
                 <a:cs typeface="Georgia" pitchFamily="34" charset="-120"/>
               </a:rPr>
-              <a:t>Atos de fala: assertivo (afirma: «os grandes comem os pequenos»); diretivo (leva o outro a agir: «Olhai, peixes»); compromissivo (compromete quem fala: «Prometo voltar amanhã»); expressivo (exprime um estado: «Oh que boa doutrina era esta…»); declarativo (muda a realidade ao ser dito por quem tem autoridade: «Declaro aberta a sessão»).</a:t>
-            </a:r>
-            <a:endParaRPr lang="en-US" sz="2000" dirty="0"/>
-          </a:p>
-          <a:p>
+              <a:t>Atos de fala:</a:t>
+            </a:r>
             <a:pPr indent="0" marL="0">
               <a:lnSpc>
                 <a:spcPct val="120000"/>
               </a:lnSpc>
-              <a:spcAft>
-                <a:spcPts val="1000"/>
-              </a:spcAft>
               <a:buNone/>
             </a:pPr>
             <a:r>
@@ -1910,7 +1901,313 @@
                 <a:ea typeface="Georgia" pitchFamily="34" charset="-122"/>
                 <a:cs typeface="Georgia" pitchFamily="34" charset="-120"/>
               </a:rPr>
-              <a:t>Modalidade: epistémica (grau de certeza: «talvez», «certamente»); deôntica (obrigação ou permissão: «deves», «podes»); apreciativa (juízo de valor: «infelizmente», «Grande escândalo»).</a:t>
+              <a:t> </a:t>
+            </a:r>
+            <a:pPr indent="0" marL="0">
+              <a:lnSpc>
+                <a:spcPct val="120000"/>
+              </a:lnSpc>
+              <a:buNone/>
+            </a:pPr>
+            <a:r>
+              <a:rPr lang="en-US" sz="2000" b="1" dirty="0">
+                <a:solidFill>
+                  <a:srgbClr val="F2F0EA"/>
+                </a:solidFill>
+                <a:latin typeface="Georgia" pitchFamily="34" charset="0"/>
+                <a:ea typeface="Georgia" pitchFamily="34" charset="-122"/>
+                <a:cs typeface="Georgia" pitchFamily="34" charset="-120"/>
+              </a:rPr>
+              <a:t>assertivo</a:t>
+            </a:r>
+            <a:pPr indent="0" marL="0">
+              <a:lnSpc>
+                <a:spcPct val="120000"/>
+              </a:lnSpc>
+              <a:buNone/>
+            </a:pPr>
+            <a:r>
+              <a:rPr lang="en-US" sz="2000" dirty="0">
+                <a:solidFill>
+                  <a:srgbClr val="F2F0EA"/>
+                </a:solidFill>
+                <a:latin typeface="Georgia" pitchFamily="34" charset="0"/>
+                <a:ea typeface="Georgia" pitchFamily="34" charset="-122"/>
+                <a:cs typeface="Georgia" pitchFamily="34" charset="-120"/>
+              </a:rPr>
+              <a:t> (afirma: «os grandes comem os pequenos»); </a:t>
+            </a:r>
+            <a:pPr indent="0" marL="0">
+              <a:lnSpc>
+                <a:spcPct val="120000"/>
+              </a:lnSpc>
+              <a:buNone/>
+            </a:pPr>
+            <a:r>
+              <a:rPr lang="en-US" sz="2000" b="1" dirty="0">
+                <a:solidFill>
+                  <a:srgbClr val="F2F0EA"/>
+                </a:solidFill>
+                <a:latin typeface="Georgia" pitchFamily="34" charset="0"/>
+                <a:ea typeface="Georgia" pitchFamily="34" charset="-122"/>
+                <a:cs typeface="Georgia" pitchFamily="34" charset="-120"/>
+              </a:rPr>
+              <a:t>diretivo</a:t>
+            </a:r>
+            <a:pPr indent="0" marL="0">
+              <a:lnSpc>
+                <a:spcPct val="120000"/>
+              </a:lnSpc>
+              <a:buNone/>
+            </a:pPr>
+            <a:r>
+              <a:rPr lang="en-US" sz="2000" dirty="0">
+                <a:solidFill>
+                  <a:srgbClr val="F2F0EA"/>
+                </a:solidFill>
+                <a:latin typeface="Georgia" pitchFamily="34" charset="0"/>
+                <a:ea typeface="Georgia" pitchFamily="34" charset="-122"/>
+                <a:cs typeface="Georgia" pitchFamily="34" charset="-120"/>
+              </a:rPr>
+              <a:t> (leva o outro a agir: «Olhai, peixes»); </a:t>
+            </a:r>
+            <a:pPr indent="0" marL="0">
+              <a:lnSpc>
+                <a:spcPct val="120000"/>
+              </a:lnSpc>
+              <a:buNone/>
+            </a:pPr>
+            <a:r>
+              <a:rPr lang="en-US" sz="2000" b="1" dirty="0">
+                <a:solidFill>
+                  <a:srgbClr val="F2F0EA"/>
+                </a:solidFill>
+                <a:latin typeface="Georgia" pitchFamily="34" charset="0"/>
+                <a:ea typeface="Georgia" pitchFamily="34" charset="-122"/>
+                <a:cs typeface="Georgia" pitchFamily="34" charset="-120"/>
+              </a:rPr>
+              <a:t>compromissivo</a:t>
+            </a:r>
+            <a:pPr indent="0" marL="0">
+              <a:lnSpc>
+                <a:spcPct val="120000"/>
+              </a:lnSpc>
+              <a:buNone/>
+            </a:pPr>
+            <a:r>
+              <a:rPr lang="en-US" sz="2000" dirty="0">
+                <a:solidFill>
+                  <a:srgbClr val="F2F0EA"/>
+                </a:solidFill>
+                <a:latin typeface="Georgia" pitchFamily="34" charset="0"/>
+                <a:ea typeface="Georgia" pitchFamily="34" charset="-122"/>
+                <a:cs typeface="Georgia" pitchFamily="34" charset="-120"/>
+              </a:rPr>
+              <a:t> (compromete quem fala: «Prometo voltar amanhã»); </a:t>
+            </a:r>
+            <a:pPr indent="0" marL="0">
+              <a:lnSpc>
+                <a:spcPct val="120000"/>
+              </a:lnSpc>
+              <a:buNone/>
+            </a:pPr>
+            <a:r>
+              <a:rPr lang="en-US" sz="2000" b="1" dirty="0">
+                <a:solidFill>
+                  <a:srgbClr val="F2F0EA"/>
+                </a:solidFill>
+                <a:latin typeface="Georgia" pitchFamily="34" charset="0"/>
+                <a:ea typeface="Georgia" pitchFamily="34" charset="-122"/>
+                <a:cs typeface="Georgia" pitchFamily="34" charset="-120"/>
+              </a:rPr>
+              <a:t>expressivo</a:t>
+            </a:r>
+            <a:pPr indent="0" marL="0">
+              <a:lnSpc>
+                <a:spcPct val="120000"/>
+              </a:lnSpc>
+              <a:buNone/>
+            </a:pPr>
+            <a:r>
+              <a:rPr lang="en-US" sz="2000" dirty="0">
+                <a:solidFill>
+                  <a:srgbClr val="F2F0EA"/>
+                </a:solidFill>
+                <a:latin typeface="Georgia" pitchFamily="34" charset="0"/>
+                <a:ea typeface="Georgia" pitchFamily="34" charset="-122"/>
+                <a:cs typeface="Georgia" pitchFamily="34" charset="-120"/>
+              </a:rPr>
+              <a:t> (exprime um estado: «Oh que boa doutrina era esta…»); </a:t>
+            </a:r>
+            <a:pPr indent="0" marL="0">
+              <a:lnSpc>
+                <a:spcPct val="120000"/>
+              </a:lnSpc>
+              <a:buNone/>
+            </a:pPr>
+            <a:r>
+              <a:rPr lang="en-US" sz="2000" b="1" dirty="0">
+                <a:solidFill>
+                  <a:srgbClr val="F2F0EA"/>
+                </a:solidFill>
+                <a:latin typeface="Georgia" pitchFamily="34" charset="0"/>
+                <a:ea typeface="Georgia" pitchFamily="34" charset="-122"/>
+                <a:cs typeface="Georgia" pitchFamily="34" charset="-120"/>
+              </a:rPr>
+              <a:t>declarativo</a:t>
+            </a:r>
+            <a:pPr indent="0" marL="0">
+              <a:lnSpc>
+                <a:spcPct val="120000"/>
+              </a:lnSpc>
+              <a:buNone/>
+            </a:pPr>
+            <a:r>
+              <a:rPr lang="en-US" sz="2000" dirty="0">
+                <a:solidFill>
+                  <a:srgbClr val="F2F0EA"/>
+                </a:solidFill>
+                <a:latin typeface="Georgia" pitchFamily="34" charset="0"/>
+                <a:ea typeface="Georgia" pitchFamily="34" charset="-122"/>
+                <a:cs typeface="Georgia" pitchFamily="34" charset="-120"/>
+              </a:rPr>
+              <a:t> (muda a realidade ao ser dito por quem tem autoridade: «Declaro aberta a sessão»). </a:t>
+            </a:r>
+            <a:pPr indent="0" marL="0">
+              <a:lnSpc>
+                <a:spcPct val="120000"/>
+              </a:lnSpc>
+              <a:buNone/>
+            </a:pPr>
+            <a:r>
+              <a:rPr lang="en-US" sz="2000" b="1" dirty="0">
+                <a:solidFill>
+                  <a:srgbClr val="F2F0EA"/>
+                </a:solidFill>
+                <a:latin typeface="Georgia" pitchFamily="34" charset="0"/>
+                <a:ea typeface="Georgia" pitchFamily="34" charset="-122"/>
+                <a:cs typeface="Georgia" pitchFamily="34" charset="-120"/>
+              </a:rPr>
+              <a:t>Modalidade:</a:t>
+            </a:r>
+            <a:pPr indent="0" marL="0">
+              <a:lnSpc>
+                <a:spcPct val="120000"/>
+              </a:lnSpc>
+              <a:buNone/>
+            </a:pPr>
+            <a:r>
+              <a:rPr lang="en-US" sz="2000" dirty="0">
+                <a:solidFill>
+                  <a:srgbClr val="F2F0EA"/>
+                </a:solidFill>
+                <a:latin typeface="Georgia" pitchFamily="34" charset="0"/>
+                <a:ea typeface="Georgia" pitchFamily="34" charset="-122"/>
+                <a:cs typeface="Georgia" pitchFamily="34" charset="-120"/>
+              </a:rPr>
+              <a:t> </a:t>
+            </a:r>
+            <a:pPr indent="0" marL="0">
+              <a:lnSpc>
+                <a:spcPct val="120000"/>
+              </a:lnSpc>
+              <a:buNone/>
+            </a:pPr>
+            <a:r>
+              <a:rPr lang="en-US" sz="2000" b="1" dirty="0">
+                <a:solidFill>
+                  <a:srgbClr val="F2F0EA"/>
+                </a:solidFill>
+                <a:latin typeface="Georgia" pitchFamily="34" charset="0"/>
+                <a:ea typeface="Georgia" pitchFamily="34" charset="-122"/>
+                <a:cs typeface="Georgia" pitchFamily="34" charset="-120"/>
+              </a:rPr>
+              <a:t>epistémica</a:t>
+            </a:r>
+            <a:pPr indent="0" marL="0">
+              <a:lnSpc>
+                <a:spcPct val="120000"/>
+              </a:lnSpc>
+              <a:buNone/>
+            </a:pPr>
+            <a:r>
+              <a:rPr lang="en-US" sz="2000" dirty="0">
+                <a:solidFill>
+                  <a:srgbClr val="F2F0EA"/>
+                </a:solidFill>
+                <a:latin typeface="Georgia" pitchFamily="34" charset="0"/>
+                <a:ea typeface="Georgia" pitchFamily="34" charset="-122"/>
+                <a:cs typeface="Georgia" pitchFamily="34" charset="-120"/>
+              </a:rPr>
+              <a:t> (grau de certeza: «talvez», «certamente»); </a:t>
+            </a:r>
+            <a:pPr indent="0" marL="0">
+              <a:lnSpc>
+                <a:spcPct val="120000"/>
+              </a:lnSpc>
+              <a:buNone/>
+            </a:pPr>
+            <a:r>
+              <a:rPr lang="en-US" sz="2000" b="1" dirty="0">
+                <a:solidFill>
+                  <a:srgbClr val="F2F0EA"/>
+                </a:solidFill>
+                <a:latin typeface="Georgia" pitchFamily="34" charset="0"/>
+                <a:ea typeface="Georgia" pitchFamily="34" charset="-122"/>
+                <a:cs typeface="Georgia" pitchFamily="34" charset="-120"/>
+              </a:rPr>
+              <a:t>deôntica</a:t>
+            </a:r>
+            <a:pPr indent="0" marL="0">
+              <a:lnSpc>
+                <a:spcPct val="120000"/>
+              </a:lnSpc>
+              <a:buNone/>
+            </a:pPr>
+            <a:r>
+              <a:rPr lang="en-US" sz="2000" dirty="0">
+                <a:solidFill>
+                  <a:srgbClr val="F2F0EA"/>
+                </a:solidFill>
+                <a:latin typeface="Georgia" pitchFamily="34" charset="0"/>
+                <a:ea typeface="Georgia" pitchFamily="34" charset="-122"/>
+                <a:cs typeface="Georgia" pitchFamily="34" charset="-120"/>
+              </a:rPr>
+              <a:t> (obrigação ou permissão: «deves», «podes»); </a:t>
+            </a:r>
+            <a:pPr indent="0" marL="0">
+              <a:lnSpc>
+                <a:spcPct val="120000"/>
+              </a:lnSpc>
+              <a:buNone/>
+            </a:pPr>
+            <a:r>
+              <a:rPr lang="en-US" sz="2000" b="1" dirty="0">
+                <a:solidFill>
+                  <a:srgbClr val="F2F0EA"/>
+                </a:solidFill>
+                <a:latin typeface="Georgia" pitchFamily="34" charset="0"/>
+                <a:ea typeface="Georgia" pitchFamily="34" charset="-122"/>
+                <a:cs typeface="Georgia" pitchFamily="34" charset="-120"/>
+              </a:rPr>
+              <a:t>apreciativa</a:t>
+            </a:r>
+            <a:pPr indent="0" marL="0">
+              <a:lnSpc>
+                <a:spcPct val="120000"/>
+              </a:lnSpc>
+              <a:buNone/>
+            </a:pPr>
+            <a:r>
+              <a:rPr lang="en-US" sz="2000" dirty="0">
+                <a:solidFill>
+                  <a:srgbClr val="F2F0EA"/>
+                </a:solidFill>
+                <a:latin typeface="Georgia" pitchFamily="34" charset="0"/>
+                <a:ea typeface="Georgia" pitchFamily="34" charset="-122"/>
+                <a:cs typeface="Georgia" pitchFamily="34" charset="-120"/>
+              </a:rPr>
+              <a:t> (juízo de valor: «infelizmente», «Grande escândalo»).</a:t>
             </a:r>
             <a:endParaRPr lang="en-US" sz="2000" dirty="0"/>
           </a:p>
